--- a/presentation/slides.pptx
+++ b/presentation/slides.pptx
@@ -10458,6 +10458,21 @@
                 <a:cs typeface="Calibri" panose="020F0502020204030204" pitchFamily="34" charset="0"/>
               </a:rPr>
               <a:t>Introduction</a:t>
+            </a:r>
+            <a:br>
+              <a:rPr lang="fr-FR" dirty="0">
+                <a:latin typeface="Calibri" panose="020F0502020204030204" pitchFamily="34" charset="0"/>
+                <a:ea typeface="Calibri" panose="020F0502020204030204" pitchFamily="34" charset="0"/>
+                <a:cs typeface="Calibri" panose="020F0502020204030204" pitchFamily="34" charset="0"/>
+              </a:rPr>
+            </a:br>
+            <a:r>
+              <a:rPr lang="fr-FR" sz="2800" dirty="0">
+                <a:latin typeface="Calibri" panose="020F0502020204030204" pitchFamily="34" charset="0"/>
+                <a:ea typeface="Calibri" panose="020F0502020204030204" pitchFamily="34" charset="0"/>
+                <a:cs typeface="Calibri" panose="020F0502020204030204" pitchFamily="34" charset="0"/>
+              </a:rPr>
+              <a:t>Business Rules</a:t>
             </a:r>
           </a:p>
         </p:txBody>
@@ -11189,17 +11204,7 @@
                 <a:ea typeface="Calibri" panose="020F0502020204030204" pitchFamily="34" charset="0"/>
                 <a:cs typeface="Calibri" panose="020F0502020204030204" pitchFamily="34" charset="0"/>
               </a:rPr>
-              <a:t> in a single </a:t>
-            </a:r>
-          </a:p>
-          <a:p>
-            <a:r>
-              <a:rPr lang="fr-FR" dirty="0">
-                <a:latin typeface="Calibri" panose="020F0502020204030204" pitchFamily="34" charset="0"/>
-                <a:ea typeface="Calibri" panose="020F0502020204030204" pitchFamily="34" charset="0"/>
-                <a:cs typeface="Calibri" panose="020F0502020204030204" pitchFamily="34" charset="0"/>
-              </a:rPr>
-              <a:t>function_app.py</a:t>
+              <a:t> in a single function_app.py</a:t>
             </a:r>
           </a:p>
           <a:p>
@@ -13998,681 +14003,215 @@
         </p:spPr>
         <p:txBody>
           <a:bodyPr>
-            <a:normAutofit fontScale="77500" lnSpcReduction="20000"/>
+            <a:noAutofit/>
           </a:bodyPr>
           <a:lstStyle/>
           <a:p>
-            <a:r>
-              <a:rPr lang="fr-FR" b="1" dirty="0" err="1">
+            <a:pPr>
+              <a:lnSpc>
+                <a:spcPct val="100000"/>
+              </a:lnSpc>
+              <a:spcBef>
+                <a:spcPts val="0"/>
+              </a:spcBef>
+            </a:pPr>
+            <a:r>
+              <a:rPr lang="en-US" sz="1400" b="1" noProof="0" dirty="0">
                 <a:latin typeface="Calibri" panose="020F0502020204030204" pitchFamily="34" charset="0"/>
                 <a:ea typeface="Calibri" panose="020F0502020204030204" pitchFamily="34" charset="0"/>
                 <a:cs typeface="Calibri" panose="020F0502020204030204" pitchFamily="34" charset="0"/>
               </a:rPr>
-              <a:t>What</a:t>
-            </a:r>
-            <a:r>
-              <a:rPr lang="fr-FR" b="1" dirty="0">
+              <a:t>What surprised me:</a:t>
+            </a:r>
+            <a:endParaRPr lang="en-US" sz="1400" noProof="0" dirty="0">
+              <a:latin typeface="Calibri" panose="020F0502020204030204" pitchFamily="34" charset="0"/>
+              <a:ea typeface="Calibri" panose="020F0502020204030204" pitchFamily="34" charset="0"/>
+              <a:cs typeface="Calibri" panose="020F0502020204030204" pitchFamily="34" charset="0"/>
+            </a:endParaRPr>
+          </a:p>
+          <a:p>
+            <a:pPr marL="569214" lvl="1" indent="-285750">
+              <a:lnSpc>
+                <a:spcPct val="100000"/>
+              </a:lnSpc>
+              <a:spcBef>
+                <a:spcPts val="0"/>
+              </a:spcBef>
+            </a:pPr>
+            <a:r>
+              <a:rPr lang="en-US" sz="1400" noProof="0" dirty="0">
                 <a:latin typeface="Calibri" panose="020F0502020204030204" pitchFamily="34" charset="0"/>
                 <a:ea typeface="Calibri" panose="020F0502020204030204" pitchFamily="34" charset="0"/>
                 <a:cs typeface="Calibri" panose="020F0502020204030204" pitchFamily="34" charset="0"/>
               </a:rPr>
-              <a:t> </a:t>
-            </a:r>
-            <a:r>
-              <a:rPr lang="fr-FR" b="1" dirty="0" err="1">
+              <a:t>Durable Functions are deceptively strict</a:t>
+            </a:r>
+          </a:p>
+          <a:p>
+            <a:pPr marL="569214" lvl="1" indent="-285750">
+              <a:lnSpc>
+                <a:spcPct val="100000"/>
+              </a:lnSpc>
+              <a:spcBef>
+                <a:spcPts val="0"/>
+              </a:spcBef>
+            </a:pPr>
+            <a:r>
+              <a:rPr lang="en-US" sz="1400" noProof="0" dirty="0">
                 <a:latin typeface="Calibri" panose="020F0502020204030204" pitchFamily="34" charset="0"/>
                 <a:ea typeface="Calibri" panose="020F0502020204030204" pitchFamily="34" charset="0"/>
                 <a:cs typeface="Calibri" panose="020F0502020204030204" pitchFamily="34" charset="0"/>
               </a:rPr>
-              <a:t>surprised</a:t>
-            </a:r>
-            <a:r>
-              <a:rPr lang="fr-FR" b="1" dirty="0">
+              <a:t>Logic Apps hides complexity behind simplicity</a:t>
+            </a:r>
+          </a:p>
+          <a:p>
+            <a:pPr marL="569214" lvl="1" indent="-285750">
+              <a:lnSpc>
+                <a:spcPct val="100000"/>
+              </a:lnSpc>
+              <a:spcBef>
+                <a:spcPts val="0"/>
+              </a:spcBef>
+            </a:pPr>
+            <a:r>
+              <a:rPr lang="en-US" sz="1400" noProof="0" dirty="0">
                 <a:latin typeface="Calibri" panose="020F0502020204030204" pitchFamily="34" charset="0"/>
                 <a:ea typeface="Calibri" panose="020F0502020204030204" pitchFamily="34" charset="0"/>
                 <a:cs typeface="Calibri" panose="020F0502020204030204" pitchFamily="34" charset="0"/>
               </a:rPr>
-              <a:t> me:</a:t>
-            </a:r>
-            <a:endParaRPr lang="fr-FR" dirty="0">
+              <a:t>The Human Interaction pattern is not free in either version </a:t>
+            </a:r>
+          </a:p>
+          <a:p>
+            <a:pPr marL="569214" lvl="1" indent="-285750">
+              <a:lnSpc>
+                <a:spcPct val="100000"/>
+              </a:lnSpc>
+              <a:spcBef>
+                <a:spcPts val="0"/>
+              </a:spcBef>
+            </a:pPr>
+            <a:r>
+              <a:rPr lang="en-US" sz="1400" noProof="0" dirty="0">
+                <a:latin typeface="Calibri" panose="020F0502020204030204" pitchFamily="34" charset="0"/>
+                <a:ea typeface="Calibri" panose="020F0502020204030204" pitchFamily="34" charset="0"/>
+                <a:cs typeface="Calibri" panose="020F0502020204030204" pitchFamily="34" charset="0"/>
+              </a:rPr>
+              <a:t>Cost is not obvious until you look </a:t>
+            </a:r>
+          </a:p>
+          <a:p>
+            <a:pPr marL="569214" lvl="1" indent="-285750">
+              <a:lnSpc>
+                <a:spcPct val="100000"/>
+              </a:lnSpc>
+              <a:spcBef>
+                <a:spcPts val="0"/>
+              </a:spcBef>
+            </a:pPr>
+            <a:endParaRPr lang="en-US" sz="1400" dirty="0">
               <a:latin typeface="Calibri" panose="020F0502020204030204" pitchFamily="34" charset="0"/>
               <a:ea typeface="Calibri" panose="020F0502020204030204" pitchFamily="34" charset="0"/>
               <a:cs typeface="Calibri" panose="020F0502020204030204" pitchFamily="34" charset="0"/>
             </a:endParaRPr>
           </a:p>
           <a:p>
-            <a:pPr marL="626364" lvl="1" indent="-342900"/>
-            <a:r>
-              <a:rPr lang="fr-FR" dirty="0">
+            <a:pPr marL="569214" lvl="1" indent="-285750">
+              <a:lnSpc>
+                <a:spcPct val="100000"/>
+              </a:lnSpc>
+              <a:spcBef>
+                <a:spcPts val="0"/>
+              </a:spcBef>
+            </a:pPr>
+            <a:endParaRPr lang="en-US" sz="1400" noProof="0" dirty="0">
+              <a:latin typeface="Calibri" panose="020F0502020204030204" pitchFamily="34" charset="0"/>
+              <a:ea typeface="Calibri" panose="020F0502020204030204" pitchFamily="34" charset="0"/>
+              <a:cs typeface="Calibri" panose="020F0502020204030204" pitchFamily="34" charset="0"/>
+            </a:endParaRPr>
+          </a:p>
+          <a:p>
+            <a:pPr>
+              <a:lnSpc>
+                <a:spcPct val="100000"/>
+              </a:lnSpc>
+              <a:spcBef>
+                <a:spcPts val="0"/>
+              </a:spcBef>
+            </a:pPr>
+            <a:r>
+              <a:rPr lang="en-US" sz="1400" b="1" noProof="0" dirty="0">
                 <a:latin typeface="Calibri" panose="020F0502020204030204" pitchFamily="34" charset="0"/>
                 <a:ea typeface="Calibri" panose="020F0502020204030204" pitchFamily="34" charset="0"/>
                 <a:cs typeface="Calibri" panose="020F0502020204030204" pitchFamily="34" charset="0"/>
               </a:rPr>
-              <a:t>Durable </a:t>
-            </a:r>
-            <a:r>
-              <a:rPr lang="fr-FR" dirty="0" err="1">
+              <a:t>What I would do differently:</a:t>
+            </a:r>
+            <a:endParaRPr lang="en-US" sz="1400" noProof="0" dirty="0">
+              <a:latin typeface="Calibri" panose="020F0502020204030204" pitchFamily="34" charset="0"/>
+              <a:ea typeface="Calibri" panose="020F0502020204030204" pitchFamily="34" charset="0"/>
+              <a:cs typeface="Calibri" panose="020F0502020204030204" pitchFamily="34" charset="0"/>
+            </a:endParaRPr>
+          </a:p>
+          <a:p>
+            <a:pPr marL="285750" indent="-285750">
+              <a:lnSpc>
+                <a:spcPct val="100000"/>
+              </a:lnSpc>
+              <a:spcBef>
+                <a:spcPts val="0"/>
+              </a:spcBef>
+              <a:buFont typeface="Arial" panose="020B0604020202020204" pitchFamily="34" charset="0"/>
+              <a:buChar char="•"/>
+            </a:pPr>
+            <a:r>
+              <a:rPr lang="en-US" sz="1400" noProof="0" dirty="0">
                 <a:latin typeface="Calibri" panose="020F0502020204030204" pitchFamily="34" charset="0"/>
                 <a:ea typeface="Calibri" panose="020F0502020204030204" pitchFamily="34" charset="0"/>
                 <a:cs typeface="Calibri" panose="020F0502020204030204" pitchFamily="34" charset="0"/>
               </a:rPr>
-              <a:t>Functions</a:t>
-            </a:r>
-            <a:r>
-              <a:rPr lang="fr-FR" dirty="0">
+              <a:t>Build Version B first to validate the business logic visually, then implement Version A with full confidence in the expected behavior</a:t>
+            </a:r>
+          </a:p>
+          <a:p>
+            <a:pPr marL="285750" indent="-285750">
+              <a:lnSpc>
+                <a:spcPct val="100000"/>
+              </a:lnSpc>
+              <a:spcBef>
+                <a:spcPts val="0"/>
+              </a:spcBef>
+              <a:buFont typeface="Arial" panose="020B0604020202020204" pitchFamily="34" charset="0"/>
+              <a:buChar char="•"/>
+            </a:pPr>
+            <a:r>
+              <a:rPr lang="en-US" sz="1400" noProof="0" dirty="0">
                 <a:latin typeface="Calibri" panose="020F0502020204030204" pitchFamily="34" charset="0"/>
                 <a:ea typeface="Calibri" panose="020F0502020204030204" pitchFamily="34" charset="0"/>
                 <a:cs typeface="Calibri" panose="020F0502020204030204" pitchFamily="34" charset="0"/>
               </a:rPr>
-              <a:t> </a:t>
-            </a:r>
-            <a:r>
-              <a:rPr lang="fr-FR" dirty="0" err="1">
+              <a:t>Add Application Insights from day one: Diagnosing cold start issues and orchestration replays without telemetry cost significant time</a:t>
+            </a:r>
+          </a:p>
+          <a:p>
+            <a:pPr marL="285750" indent="-285750">
+              <a:lnSpc>
+                <a:spcPct val="100000"/>
+              </a:lnSpc>
+              <a:spcBef>
+                <a:spcPts val="0"/>
+              </a:spcBef>
+              <a:buFont typeface="Arial" panose="020B0604020202020204" pitchFamily="34" charset="0"/>
+              <a:buChar char="•"/>
+            </a:pPr>
+            <a:r>
+              <a:rPr lang="en-US" sz="1400" noProof="0" dirty="0">
                 <a:latin typeface="Calibri" panose="020F0502020204030204" pitchFamily="34" charset="0"/>
                 <a:ea typeface="Calibri" panose="020F0502020204030204" pitchFamily="34" charset="0"/>
                 <a:cs typeface="Calibri" panose="020F0502020204030204" pitchFamily="34" charset="0"/>
               </a:rPr>
-              <a:t>orchestrators</a:t>
-            </a:r>
-            <a:r>
-              <a:rPr lang="fr-FR" dirty="0">
-                <a:latin typeface="Calibri" panose="020F0502020204030204" pitchFamily="34" charset="0"/>
-                <a:ea typeface="Calibri" panose="020F0502020204030204" pitchFamily="34" charset="0"/>
-                <a:cs typeface="Calibri" panose="020F0502020204030204" pitchFamily="34" charset="0"/>
-              </a:rPr>
-              <a:t> must </a:t>
-            </a:r>
-            <a:r>
-              <a:rPr lang="fr-FR" dirty="0" err="1">
-                <a:latin typeface="Calibri" panose="020F0502020204030204" pitchFamily="34" charset="0"/>
-                <a:ea typeface="Calibri" panose="020F0502020204030204" pitchFamily="34" charset="0"/>
-                <a:cs typeface="Calibri" panose="020F0502020204030204" pitchFamily="34" charset="0"/>
-              </a:rPr>
-              <a:t>be</a:t>
-            </a:r>
-            <a:r>
-              <a:rPr lang="fr-FR" dirty="0">
-                <a:latin typeface="Calibri" panose="020F0502020204030204" pitchFamily="34" charset="0"/>
-                <a:ea typeface="Calibri" panose="020F0502020204030204" pitchFamily="34" charset="0"/>
-                <a:cs typeface="Calibri" panose="020F0502020204030204" pitchFamily="34" charset="0"/>
-              </a:rPr>
-              <a:t> </a:t>
-            </a:r>
-            <a:r>
-              <a:rPr lang="fr-FR" dirty="0" err="1">
-                <a:latin typeface="Calibri" panose="020F0502020204030204" pitchFamily="34" charset="0"/>
-                <a:ea typeface="Calibri" panose="020F0502020204030204" pitchFamily="34" charset="0"/>
-                <a:cs typeface="Calibri" panose="020F0502020204030204" pitchFamily="34" charset="0"/>
-              </a:rPr>
-              <a:t>deterministic</a:t>
-            </a:r>
-            <a:r>
-              <a:rPr lang="fr-FR" dirty="0">
-                <a:latin typeface="Calibri" panose="020F0502020204030204" pitchFamily="34" charset="0"/>
-                <a:ea typeface="Calibri" panose="020F0502020204030204" pitchFamily="34" charset="0"/>
-                <a:cs typeface="Calibri" panose="020F0502020204030204" pitchFamily="34" charset="0"/>
-              </a:rPr>
-              <a:t> « </a:t>
-            </a:r>
-            <a:r>
-              <a:rPr lang="fr-FR" dirty="0" err="1">
-                <a:latin typeface="Calibri" panose="020F0502020204030204" pitchFamily="34" charset="0"/>
-                <a:ea typeface="Calibri" panose="020F0502020204030204" pitchFamily="34" charset="0"/>
-                <a:cs typeface="Calibri" panose="020F0502020204030204" pitchFamily="34" charset="0"/>
-              </a:rPr>
-              <a:t>approval_event.result</a:t>
-            </a:r>
-            <a:r>
-              <a:rPr lang="fr-FR" dirty="0">
-                <a:latin typeface="Calibri" panose="020F0502020204030204" pitchFamily="34" charset="0"/>
-                <a:ea typeface="Calibri" panose="020F0502020204030204" pitchFamily="34" charset="0"/>
-                <a:cs typeface="Calibri" panose="020F0502020204030204" pitchFamily="34" charset="0"/>
-              </a:rPr>
-              <a:t> »  </a:t>
-            </a:r>
-            <a:r>
-              <a:rPr lang="fr-FR" dirty="0" err="1">
-                <a:latin typeface="Calibri" panose="020F0502020204030204" pitchFamily="34" charset="0"/>
-                <a:ea typeface="Calibri" panose="020F0502020204030204" pitchFamily="34" charset="0"/>
-                <a:cs typeface="Calibri" panose="020F0502020204030204" pitchFamily="34" charset="0"/>
-              </a:rPr>
-              <a:t>returns</a:t>
-            </a:r>
-            <a:r>
-              <a:rPr lang="fr-FR" dirty="0">
-                <a:latin typeface="Calibri" panose="020F0502020204030204" pitchFamily="34" charset="0"/>
-                <a:ea typeface="Calibri" panose="020F0502020204030204" pitchFamily="34" charset="0"/>
-                <a:cs typeface="Calibri" panose="020F0502020204030204" pitchFamily="34" charset="0"/>
-              </a:rPr>
-              <a:t> a JSON string, not a dict</a:t>
-            </a:r>
-          </a:p>
-          <a:p>
-            <a:pPr marL="626364" lvl="1" indent="-342900"/>
-            <a:r>
-              <a:rPr lang="fr-FR" dirty="0">
-                <a:latin typeface="Calibri" panose="020F0502020204030204" pitchFamily="34" charset="0"/>
-                <a:ea typeface="Calibri" panose="020F0502020204030204" pitchFamily="34" charset="0"/>
-                <a:cs typeface="Calibri" panose="020F0502020204030204" pitchFamily="34" charset="0"/>
-              </a:rPr>
-              <a:t>Logic Apps base64-encodes Service Bus messages. It </a:t>
-            </a:r>
-            <a:r>
-              <a:rPr lang="fr-FR" dirty="0" err="1">
-                <a:latin typeface="Calibri" panose="020F0502020204030204" pitchFamily="34" charset="0"/>
-                <a:ea typeface="Calibri" panose="020F0502020204030204" pitchFamily="34" charset="0"/>
-                <a:cs typeface="Calibri" panose="020F0502020204030204" pitchFamily="34" charset="0"/>
-              </a:rPr>
-              <a:t>requires</a:t>
-            </a:r>
-            <a:r>
-              <a:rPr lang="fr-FR" dirty="0">
-                <a:latin typeface="Calibri" panose="020F0502020204030204" pitchFamily="34" charset="0"/>
-                <a:ea typeface="Calibri" panose="020F0502020204030204" pitchFamily="34" charset="0"/>
-                <a:cs typeface="Calibri" panose="020F0502020204030204" pitchFamily="34" charset="0"/>
-              </a:rPr>
-              <a:t> a Compose action to </a:t>
-            </a:r>
-            <a:r>
-              <a:rPr lang="fr-FR" dirty="0" err="1">
-                <a:latin typeface="Calibri" panose="020F0502020204030204" pitchFamily="34" charset="0"/>
-                <a:ea typeface="Calibri" panose="020F0502020204030204" pitchFamily="34" charset="0"/>
-                <a:cs typeface="Calibri" panose="020F0502020204030204" pitchFamily="34" charset="0"/>
-              </a:rPr>
-              <a:t>decode</a:t>
-            </a:r>
-            <a:endParaRPr lang="fr-FR" dirty="0">
-              <a:latin typeface="Calibri" panose="020F0502020204030204" pitchFamily="34" charset="0"/>
-              <a:ea typeface="Calibri" panose="020F0502020204030204" pitchFamily="34" charset="0"/>
-              <a:cs typeface="Calibri" panose="020F0502020204030204" pitchFamily="34" charset="0"/>
-            </a:endParaRPr>
-          </a:p>
-          <a:p>
-            <a:pPr marL="626364" lvl="1" indent="-342900"/>
-            <a:r>
-              <a:rPr lang="fr-FR" dirty="0">
-                <a:latin typeface="Calibri" panose="020F0502020204030204" pitchFamily="34" charset="0"/>
-                <a:ea typeface="Calibri" panose="020F0502020204030204" pitchFamily="34" charset="0"/>
-                <a:cs typeface="Calibri" panose="020F0502020204030204" pitchFamily="34" charset="0"/>
-              </a:rPr>
-              <a:t>HTTP </a:t>
-            </a:r>
-            <a:r>
-              <a:rPr lang="fr-FR" dirty="0" err="1">
-                <a:latin typeface="Calibri" panose="020F0502020204030204" pitchFamily="34" charset="0"/>
-                <a:ea typeface="Calibri" panose="020F0502020204030204" pitchFamily="34" charset="0"/>
-                <a:cs typeface="Calibri" panose="020F0502020204030204" pitchFamily="34" charset="0"/>
-              </a:rPr>
-              <a:t>Webhook</a:t>
-            </a:r>
-            <a:r>
-              <a:rPr lang="fr-FR" dirty="0">
-                <a:latin typeface="Calibri" panose="020F0502020204030204" pitchFamily="34" charset="0"/>
-                <a:ea typeface="Calibri" panose="020F0502020204030204" pitchFamily="34" charset="0"/>
-                <a:cs typeface="Calibri" panose="020F0502020204030204" pitchFamily="34" charset="0"/>
-              </a:rPr>
-              <a:t> in Logic Apps </a:t>
-            </a:r>
-            <a:r>
-              <a:rPr lang="fr-FR" dirty="0" err="1">
-                <a:latin typeface="Calibri" panose="020F0502020204030204" pitchFamily="34" charset="0"/>
-                <a:ea typeface="Calibri" panose="020F0502020204030204" pitchFamily="34" charset="0"/>
-                <a:cs typeface="Calibri" panose="020F0502020204030204" pitchFamily="34" charset="0"/>
-              </a:rPr>
-              <a:t>sends</a:t>
-            </a:r>
-            <a:r>
-              <a:rPr lang="fr-FR" dirty="0">
-                <a:latin typeface="Calibri" panose="020F0502020204030204" pitchFamily="34" charset="0"/>
-                <a:ea typeface="Calibri" panose="020F0502020204030204" pitchFamily="34" charset="0"/>
-                <a:cs typeface="Calibri" panose="020F0502020204030204" pitchFamily="34" charset="0"/>
-              </a:rPr>
-              <a:t> a POST to </a:t>
-            </a:r>
-            <a:r>
-              <a:rPr lang="fr-FR" dirty="0" err="1">
-                <a:latin typeface="Calibri" panose="020F0502020204030204" pitchFamily="34" charset="0"/>
-                <a:ea typeface="Calibri" panose="020F0502020204030204" pitchFamily="34" charset="0"/>
-                <a:cs typeface="Calibri" panose="020F0502020204030204" pitchFamily="34" charset="0"/>
-              </a:rPr>
-              <a:t>subscribe</a:t>
-            </a:r>
-            <a:r>
-              <a:rPr lang="fr-FR" dirty="0">
-                <a:latin typeface="Calibri" panose="020F0502020204030204" pitchFamily="34" charset="0"/>
-                <a:ea typeface="Calibri" panose="020F0502020204030204" pitchFamily="34" charset="0"/>
-                <a:cs typeface="Calibri" panose="020F0502020204030204" pitchFamily="34" charset="0"/>
-              </a:rPr>
-              <a:t>, not a GET. It </a:t>
-            </a:r>
-            <a:r>
-              <a:rPr lang="fr-FR" dirty="0" err="1">
-                <a:latin typeface="Calibri" panose="020F0502020204030204" pitchFamily="34" charset="0"/>
-                <a:ea typeface="Calibri" panose="020F0502020204030204" pitchFamily="34" charset="0"/>
-                <a:cs typeface="Calibri" panose="020F0502020204030204" pitchFamily="34" charset="0"/>
-              </a:rPr>
-              <a:t>required</a:t>
-            </a:r>
-            <a:r>
-              <a:rPr lang="fr-FR" dirty="0">
-                <a:latin typeface="Calibri" panose="020F0502020204030204" pitchFamily="34" charset="0"/>
-                <a:ea typeface="Calibri" panose="020F0502020204030204" pitchFamily="34" charset="0"/>
-                <a:cs typeface="Calibri" panose="020F0502020204030204" pitchFamily="34" charset="0"/>
-              </a:rPr>
-              <a:t> </a:t>
-            </a:r>
-            <a:r>
-              <a:rPr lang="fr-FR" dirty="0" err="1">
-                <a:latin typeface="Calibri" panose="020F0502020204030204" pitchFamily="34" charset="0"/>
-                <a:ea typeface="Calibri" panose="020F0502020204030204" pitchFamily="34" charset="0"/>
-                <a:cs typeface="Calibri" panose="020F0502020204030204" pitchFamily="34" charset="0"/>
-              </a:rPr>
-              <a:t>updating</a:t>
-            </a:r>
-            <a:r>
-              <a:rPr lang="fr-FR" dirty="0">
-                <a:latin typeface="Calibri" panose="020F0502020204030204" pitchFamily="34" charset="0"/>
-                <a:ea typeface="Calibri" panose="020F0502020204030204" pitchFamily="34" charset="0"/>
-                <a:cs typeface="Calibri" panose="020F0502020204030204" pitchFamily="34" charset="0"/>
-              </a:rPr>
-              <a:t> the </a:t>
-            </a:r>
-            <a:r>
-              <a:rPr lang="fr-FR" dirty="0" err="1">
-                <a:latin typeface="Calibri" panose="020F0502020204030204" pitchFamily="34" charset="0"/>
-                <a:ea typeface="Calibri" panose="020F0502020204030204" pitchFamily="34" charset="0"/>
-                <a:cs typeface="Calibri" panose="020F0502020204030204" pitchFamily="34" charset="0"/>
-              </a:rPr>
-              <a:t>function</a:t>
-            </a:r>
-            <a:r>
-              <a:rPr lang="fr-FR" dirty="0">
-                <a:latin typeface="Calibri" panose="020F0502020204030204" pitchFamily="34" charset="0"/>
-                <a:ea typeface="Calibri" panose="020F0502020204030204" pitchFamily="34" charset="0"/>
-                <a:cs typeface="Calibri" panose="020F0502020204030204" pitchFamily="34" charset="0"/>
-              </a:rPr>
-              <a:t> to </a:t>
-            </a:r>
-            <a:r>
-              <a:rPr lang="fr-FR" dirty="0" err="1">
-                <a:latin typeface="Calibri" panose="020F0502020204030204" pitchFamily="34" charset="0"/>
-                <a:ea typeface="Calibri" panose="020F0502020204030204" pitchFamily="34" charset="0"/>
-                <a:cs typeface="Calibri" panose="020F0502020204030204" pitchFamily="34" charset="0"/>
-              </a:rPr>
-              <a:t>accept</a:t>
-            </a:r>
-            <a:r>
-              <a:rPr lang="fr-FR" dirty="0">
-                <a:latin typeface="Calibri" panose="020F0502020204030204" pitchFamily="34" charset="0"/>
-                <a:ea typeface="Calibri" panose="020F0502020204030204" pitchFamily="34" charset="0"/>
-                <a:cs typeface="Calibri" panose="020F0502020204030204" pitchFamily="34" charset="0"/>
-              </a:rPr>
-              <a:t> </a:t>
-            </a:r>
-            <a:r>
-              <a:rPr lang="fr-FR" dirty="0" err="1">
-                <a:latin typeface="Calibri" panose="020F0502020204030204" pitchFamily="34" charset="0"/>
-                <a:ea typeface="Calibri" panose="020F0502020204030204" pitchFamily="34" charset="0"/>
-                <a:cs typeface="Calibri" panose="020F0502020204030204" pitchFamily="34" charset="0"/>
-              </a:rPr>
-              <a:t>both</a:t>
-            </a:r>
-            <a:r>
-              <a:rPr lang="fr-FR" dirty="0">
-                <a:latin typeface="Calibri" panose="020F0502020204030204" pitchFamily="34" charset="0"/>
-                <a:ea typeface="Calibri" panose="020F0502020204030204" pitchFamily="34" charset="0"/>
-                <a:cs typeface="Calibri" panose="020F0502020204030204" pitchFamily="34" charset="0"/>
-              </a:rPr>
-              <a:t> </a:t>
-            </a:r>
-            <a:r>
-              <a:rPr lang="fr-FR" dirty="0" err="1">
-                <a:latin typeface="Calibri" panose="020F0502020204030204" pitchFamily="34" charset="0"/>
-                <a:ea typeface="Calibri" panose="020F0502020204030204" pitchFamily="34" charset="0"/>
-                <a:cs typeface="Calibri" panose="020F0502020204030204" pitchFamily="34" charset="0"/>
-              </a:rPr>
-              <a:t>methods</a:t>
-            </a:r>
-            <a:endParaRPr lang="fr-FR" dirty="0">
-              <a:latin typeface="Calibri" panose="020F0502020204030204" pitchFamily="34" charset="0"/>
-              <a:ea typeface="Calibri" panose="020F0502020204030204" pitchFamily="34" charset="0"/>
-              <a:cs typeface="Calibri" panose="020F0502020204030204" pitchFamily="34" charset="0"/>
-            </a:endParaRPr>
-          </a:p>
-          <a:p>
-            <a:pPr marL="626364" lvl="1" indent="-342900"/>
-            <a:r>
-              <a:rPr lang="fr-FR" dirty="0">
-                <a:latin typeface="Calibri" panose="020F0502020204030204" pitchFamily="34" charset="0"/>
-                <a:ea typeface="Calibri" panose="020F0502020204030204" pitchFamily="34" charset="0"/>
-                <a:cs typeface="Calibri" panose="020F0502020204030204" pitchFamily="34" charset="0"/>
-              </a:rPr>
-              <a:t>The Send </a:t>
-            </a:r>
-            <a:r>
-              <a:rPr lang="fr-FR" dirty="0" err="1">
-                <a:latin typeface="Calibri" panose="020F0502020204030204" pitchFamily="34" charset="0"/>
-                <a:ea typeface="Calibri" panose="020F0502020204030204" pitchFamily="34" charset="0"/>
-                <a:cs typeface="Calibri" panose="020F0502020204030204" pitchFamily="34" charset="0"/>
-              </a:rPr>
-              <a:t>Approval</a:t>
-            </a:r>
-            <a:r>
-              <a:rPr lang="fr-FR" dirty="0">
-                <a:latin typeface="Calibri" panose="020F0502020204030204" pitchFamily="34" charset="0"/>
-                <a:ea typeface="Calibri" panose="020F0502020204030204" pitchFamily="34" charset="0"/>
-                <a:cs typeface="Calibri" panose="020F0502020204030204" pitchFamily="34" charset="0"/>
-              </a:rPr>
-              <a:t> Email </a:t>
-            </a:r>
-            <a:r>
-              <a:rPr lang="fr-FR" dirty="0" err="1">
-                <a:latin typeface="Calibri" panose="020F0502020204030204" pitchFamily="34" charset="0"/>
-                <a:ea typeface="Calibri" panose="020F0502020204030204" pitchFamily="34" charset="0"/>
-                <a:cs typeface="Calibri" panose="020F0502020204030204" pitchFamily="34" charset="0"/>
-              </a:rPr>
-              <a:t>connector</a:t>
-            </a:r>
-            <a:r>
-              <a:rPr lang="fr-FR" dirty="0">
-                <a:latin typeface="Calibri" panose="020F0502020204030204" pitchFamily="34" charset="0"/>
-                <a:ea typeface="Calibri" panose="020F0502020204030204" pitchFamily="34" charset="0"/>
-                <a:cs typeface="Calibri" panose="020F0502020204030204" pitchFamily="34" charset="0"/>
-              </a:rPr>
-              <a:t> </a:t>
-            </a:r>
-            <a:r>
-              <a:rPr lang="fr-FR" dirty="0" err="1">
-                <a:latin typeface="Calibri" panose="020F0502020204030204" pitchFamily="34" charset="0"/>
-                <a:ea typeface="Calibri" panose="020F0502020204030204" pitchFamily="34" charset="0"/>
-                <a:cs typeface="Calibri" panose="020F0502020204030204" pitchFamily="34" charset="0"/>
-              </a:rPr>
-              <a:t>is</a:t>
-            </a:r>
-            <a:r>
-              <a:rPr lang="fr-FR" dirty="0">
-                <a:latin typeface="Calibri" panose="020F0502020204030204" pitchFamily="34" charset="0"/>
-                <a:ea typeface="Calibri" panose="020F0502020204030204" pitchFamily="34" charset="0"/>
-                <a:cs typeface="Calibri" panose="020F0502020204030204" pitchFamily="34" charset="0"/>
-              </a:rPr>
-              <a:t> </a:t>
-            </a:r>
-            <a:r>
-              <a:rPr lang="fr-FR" dirty="0" err="1">
-                <a:latin typeface="Calibri" panose="020F0502020204030204" pitchFamily="34" charset="0"/>
-                <a:ea typeface="Calibri" panose="020F0502020204030204" pitchFamily="34" charset="0"/>
-                <a:cs typeface="Calibri" panose="020F0502020204030204" pitchFamily="34" charset="0"/>
-              </a:rPr>
-              <a:t>much</a:t>
-            </a:r>
-            <a:r>
-              <a:rPr lang="fr-FR" dirty="0">
-                <a:latin typeface="Calibri" panose="020F0502020204030204" pitchFamily="34" charset="0"/>
-                <a:ea typeface="Calibri" panose="020F0502020204030204" pitchFamily="34" charset="0"/>
-                <a:cs typeface="Calibri" panose="020F0502020204030204" pitchFamily="34" charset="0"/>
-              </a:rPr>
-              <a:t> </a:t>
-            </a:r>
-            <a:r>
-              <a:rPr lang="fr-FR" dirty="0" err="1">
-                <a:latin typeface="Calibri" panose="020F0502020204030204" pitchFamily="34" charset="0"/>
-                <a:ea typeface="Calibri" panose="020F0502020204030204" pitchFamily="34" charset="0"/>
-                <a:cs typeface="Calibri" panose="020F0502020204030204" pitchFamily="34" charset="0"/>
-              </a:rPr>
-              <a:t>simpler</a:t>
-            </a:r>
-            <a:r>
-              <a:rPr lang="fr-FR" dirty="0">
-                <a:latin typeface="Calibri" panose="020F0502020204030204" pitchFamily="34" charset="0"/>
-                <a:ea typeface="Calibri" panose="020F0502020204030204" pitchFamily="34" charset="0"/>
-                <a:cs typeface="Calibri" panose="020F0502020204030204" pitchFamily="34" charset="0"/>
-              </a:rPr>
-              <a:t> </a:t>
-            </a:r>
-            <a:r>
-              <a:rPr lang="fr-FR" dirty="0" err="1">
-                <a:latin typeface="Calibri" panose="020F0502020204030204" pitchFamily="34" charset="0"/>
-                <a:ea typeface="Calibri" panose="020F0502020204030204" pitchFamily="34" charset="0"/>
-                <a:cs typeface="Calibri" panose="020F0502020204030204" pitchFamily="34" charset="0"/>
-              </a:rPr>
-              <a:t>than</a:t>
-            </a:r>
-            <a:r>
-              <a:rPr lang="fr-FR" dirty="0">
-                <a:latin typeface="Calibri" panose="020F0502020204030204" pitchFamily="34" charset="0"/>
-                <a:ea typeface="Calibri" panose="020F0502020204030204" pitchFamily="34" charset="0"/>
-                <a:cs typeface="Calibri" panose="020F0502020204030204" pitchFamily="34" charset="0"/>
-              </a:rPr>
-              <a:t> building a custom callback</a:t>
-            </a:r>
-          </a:p>
-          <a:p>
-            <a:r>
-              <a:rPr lang="fr-FR" b="1" dirty="0" err="1">
-                <a:latin typeface="Calibri" panose="020F0502020204030204" pitchFamily="34" charset="0"/>
-                <a:ea typeface="Calibri" panose="020F0502020204030204" pitchFamily="34" charset="0"/>
-                <a:cs typeface="Calibri" panose="020F0502020204030204" pitchFamily="34" charset="0"/>
-              </a:rPr>
-              <a:t>What</a:t>
-            </a:r>
-            <a:r>
-              <a:rPr lang="fr-FR" b="1" dirty="0">
-                <a:latin typeface="Calibri" panose="020F0502020204030204" pitchFamily="34" charset="0"/>
-                <a:ea typeface="Calibri" panose="020F0502020204030204" pitchFamily="34" charset="0"/>
-                <a:cs typeface="Calibri" panose="020F0502020204030204" pitchFamily="34" charset="0"/>
-              </a:rPr>
-              <a:t> I </a:t>
-            </a:r>
-            <a:r>
-              <a:rPr lang="fr-FR" b="1" dirty="0" err="1">
-                <a:latin typeface="Calibri" panose="020F0502020204030204" pitchFamily="34" charset="0"/>
-                <a:ea typeface="Calibri" panose="020F0502020204030204" pitchFamily="34" charset="0"/>
-                <a:cs typeface="Calibri" panose="020F0502020204030204" pitchFamily="34" charset="0"/>
-              </a:rPr>
-              <a:t>would</a:t>
-            </a:r>
-            <a:r>
-              <a:rPr lang="fr-FR" b="1" dirty="0">
-                <a:latin typeface="Calibri" panose="020F0502020204030204" pitchFamily="34" charset="0"/>
-                <a:ea typeface="Calibri" panose="020F0502020204030204" pitchFamily="34" charset="0"/>
-                <a:cs typeface="Calibri" panose="020F0502020204030204" pitchFamily="34" charset="0"/>
-              </a:rPr>
-              <a:t> do </a:t>
-            </a:r>
-            <a:r>
-              <a:rPr lang="fr-FR" b="1" dirty="0" err="1">
-                <a:latin typeface="Calibri" panose="020F0502020204030204" pitchFamily="34" charset="0"/>
-                <a:ea typeface="Calibri" panose="020F0502020204030204" pitchFamily="34" charset="0"/>
-                <a:cs typeface="Calibri" panose="020F0502020204030204" pitchFamily="34" charset="0"/>
-              </a:rPr>
-              <a:t>differently</a:t>
-            </a:r>
-            <a:r>
-              <a:rPr lang="fr-FR" b="1" dirty="0">
-                <a:latin typeface="Calibri" panose="020F0502020204030204" pitchFamily="34" charset="0"/>
-                <a:ea typeface="Calibri" panose="020F0502020204030204" pitchFamily="34" charset="0"/>
-                <a:cs typeface="Calibri" panose="020F0502020204030204" pitchFamily="34" charset="0"/>
-              </a:rPr>
-              <a:t>:</a:t>
-            </a:r>
-            <a:endParaRPr lang="fr-FR" dirty="0">
-              <a:latin typeface="Calibri" panose="020F0502020204030204" pitchFamily="34" charset="0"/>
-              <a:ea typeface="Calibri" panose="020F0502020204030204" pitchFamily="34" charset="0"/>
-              <a:cs typeface="Calibri" panose="020F0502020204030204" pitchFamily="34" charset="0"/>
-            </a:endParaRPr>
-          </a:p>
-          <a:p>
-            <a:pPr marL="626364" lvl="1" indent="-342900"/>
-            <a:r>
-              <a:rPr lang="fr-FR" dirty="0">
-                <a:latin typeface="Calibri" panose="020F0502020204030204" pitchFamily="34" charset="0"/>
-                <a:ea typeface="Calibri" panose="020F0502020204030204" pitchFamily="34" charset="0"/>
-                <a:cs typeface="Calibri" panose="020F0502020204030204" pitchFamily="34" charset="0"/>
-              </a:rPr>
-              <a:t>Start </a:t>
-            </a:r>
-            <a:r>
-              <a:rPr lang="fr-FR" dirty="0" err="1">
-                <a:latin typeface="Calibri" panose="020F0502020204030204" pitchFamily="34" charset="0"/>
-                <a:ea typeface="Calibri" panose="020F0502020204030204" pitchFamily="34" charset="0"/>
-                <a:cs typeface="Calibri" panose="020F0502020204030204" pitchFamily="34" charset="0"/>
-              </a:rPr>
-              <a:t>with</a:t>
-            </a:r>
-            <a:r>
-              <a:rPr lang="fr-FR" dirty="0">
-                <a:latin typeface="Calibri" panose="020F0502020204030204" pitchFamily="34" charset="0"/>
-                <a:ea typeface="Calibri" panose="020F0502020204030204" pitchFamily="34" charset="0"/>
-                <a:cs typeface="Calibri" panose="020F0502020204030204" pitchFamily="34" charset="0"/>
-              </a:rPr>
-              <a:t> Version B to </a:t>
-            </a:r>
-            <a:r>
-              <a:rPr lang="fr-FR" dirty="0" err="1">
-                <a:latin typeface="Calibri" panose="020F0502020204030204" pitchFamily="34" charset="0"/>
-                <a:ea typeface="Calibri" panose="020F0502020204030204" pitchFamily="34" charset="0"/>
-                <a:cs typeface="Calibri" panose="020F0502020204030204" pitchFamily="34" charset="0"/>
-              </a:rPr>
-              <a:t>understand</a:t>
-            </a:r>
-            <a:r>
-              <a:rPr lang="fr-FR" dirty="0">
-                <a:latin typeface="Calibri" panose="020F0502020204030204" pitchFamily="34" charset="0"/>
-                <a:ea typeface="Calibri" panose="020F0502020204030204" pitchFamily="34" charset="0"/>
-                <a:cs typeface="Calibri" panose="020F0502020204030204" pitchFamily="34" charset="0"/>
-              </a:rPr>
-              <a:t> the business </a:t>
-            </a:r>
-            <a:r>
-              <a:rPr lang="fr-FR" dirty="0" err="1">
-                <a:latin typeface="Calibri" panose="020F0502020204030204" pitchFamily="34" charset="0"/>
-                <a:ea typeface="Calibri" panose="020F0502020204030204" pitchFamily="34" charset="0"/>
-                <a:cs typeface="Calibri" panose="020F0502020204030204" pitchFamily="34" charset="0"/>
-              </a:rPr>
-              <a:t>logic</a:t>
-            </a:r>
-            <a:r>
-              <a:rPr lang="fr-FR" dirty="0">
-                <a:latin typeface="Calibri" panose="020F0502020204030204" pitchFamily="34" charset="0"/>
-                <a:ea typeface="Calibri" panose="020F0502020204030204" pitchFamily="34" charset="0"/>
-                <a:cs typeface="Calibri" panose="020F0502020204030204" pitchFamily="34" charset="0"/>
-              </a:rPr>
-              <a:t> </a:t>
-            </a:r>
-            <a:r>
-              <a:rPr lang="fr-FR" dirty="0" err="1">
-                <a:latin typeface="Calibri" panose="020F0502020204030204" pitchFamily="34" charset="0"/>
-                <a:ea typeface="Calibri" panose="020F0502020204030204" pitchFamily="34" charset="0"/>
-                <a:cs typeface="Calibri" panose="020F0502020204030204" pitchFamily="34" charset="0"/>
-              </a:rPr>
-              <a:t>visually</a:t>
-            </a:r>
-            <a:r>
-              <a:rPr lang="fr-FR" dirty="0">
-                <a:latin typeface="Calibri" panose="020F0502020204030204" pitchFamily="34" charset="0"/>
-                <a:ea typeface="Calibri" panose="020F0502020204030204" pitchFamily="34" charset="0"/>
-                <a:cs typeface="Calibri" panose="020F0502020204030204" pitchFamily="34" charset="0"/>
-              </a:rPr>
-              <a:t>, </a:t>
-            </a:r>
-            <a:r>
-              <a:rPr lang="fr-FR" dirty="0" err="1">
-                <a:latin typeface="Calibri" panose="020F0502020204030204" pitchFamily="34" charset="0"/>
-                <a:ea typeface="Calibri" panose="020F0502020204030204" pitchFamily="34" charset="0"/>
-                <a:cs typeface="Calibri" panose="020F0502020204030204" pitchFamily="34" charset="0"/>
-              </a:rPr>
-              <a:t>then</a:t>
-            </a:r>
-            <a:r>
-              <a:rPr lang="fr-FR" dirty="0">
-                <a:latin typeface="Calibri" panose="020F0502020204030204" pitchFamily="34" charset="0"/>
-                <a:ea typeface="Calibri" panose="020F0502020204030204" pitchFamily="34" charset="0"/>
-                <a:cs typeface="Calibri" panose="020F0502020204030204" pitchFamily="34" charset="0"/>
-              </a:rPr>
-              <a:t> port to Version A</a:t>
-            </a:r>
-          </a:p>
-          <a:p>
-            <a:pPr marL="626364" lvl="1" indent="-342900"/>
-            <a:r>
-              <a:rPr lang="fr-FR" dirty="0">
-                <a:latin typeface="Calibri" panose="020F0502020204030204" pitchFamily="34" charset="0"/>
-                <a:ea typeface="Calibri" panose="020F0502020204030204" pitchFamily="34" charset="0"/>
-                <a:cs typeface="Calibri" panose="020F0502020204030204" pitchFamily="34" charset="0"/>
-              </a:rPr>
-              <a:t>Add Application Insights </a:t>
-            </a:r>
-            <a:r>
-              <a:rPr lang="fr-FR" dirty="0" err="1">
-                <a:latin typeface="Calibri" panose="020F0502020204030204" pitchFamily="34" charset="0"/>
-                <a:ea typeface="Calibri" panose="020F0502020204030204" pitchFamily="34" charset="0"/>
-                <a:cs typeface="Calibri" panose="020F0502020204030204" pitchFamily="34" charset="0"/>
-              </a:rPr>
-              <a:t>from</a:t>
-            </a:r>
-            <a:r>
-              <a:rPr lang="fr-FR" dirty="0">
-                <a:latin typeface="Calibri" panose="020F0502020204030204" pitchFamily="34" charset="0"/>
-                <a:ea typeface="Calibri" panose="020F0502020204030204" pitchFamily="34" charset="0"/>
-                <a:cs typeface="Calibri" panose="020F0502020204030204" pitchFamily="34" charset="0"/>
-              </a:rPr>
-              <a:t> the start for </a:t>
-            </a:r>
-            <a:r>
-              <a:rPr lang="fr-FR" dirty="0" err="1">
-                <a:latin typeface="Calibri" panose="020F0502020204030204" pitchFamily="34" charset="0"/>
-                <a:ea typeface="Calibri" panose="020F0502020204030204" pitchFamily="34" charset="0"/>
-                <a:cs typeface="Calibri" panose="020F0502020204030204" pitchFamily="34" charset="0"/>
-              </a:rPr>
-              <a:t>better</a:t>
-            </a:r>
-            <a:r>
-              <a:rPr lang="fr-FR" dirty="0">
-                <a:latin typeface="Calibri" panose="020F0502020204030204" pitchFamily="34" charset="0"/>
-                <a:ea typeface="Calibri" panose="020F0502020204030204" pitchFamily="34" charset="0"/>
-                <a:cs typeface="Calibri" panose="020F0502020204030204" pitchFamily="34" charset="0"/>
-              </a:rPr>
-              <a:t> </a:t>
-            </a:r>
-            <a:r>
-              <a:rPr lang="fr-FR" dirty="0" err="1">
-                <a:latin typeface="Calibri" panose="020F0502020204030204" pitchFamily="34" charset="0"/>
-                <a:ea typeface="Calibri" panose="020F0502020204030204" pitchFamily="34" charset="0"/>
-                <a:cs typeface="Calibri" panose="020F0502020204030204" pitchFamily="34" charset="0"/>
-              </a:rPr>
-              <a:t>telemetry</a:t>
-            </a:r>
-            <a:endParaRPr lang="fr-FR" dirty="0">
-              <a:latin typeface="Calibri" panose="020F0502020204030204" pitchFamily="34" charset="0"/>
-              <a:ea typeface="Calibri" panose="020F0502020204030204" pitchFamily="34" charset="0"/>
-              <a:cs typeface="Calibri" panose="020F0502020204030204" pitchFamily="34" charset="0"/>
-            </a:endParaRPr>
-          </a:p>
-          <a:p>
-            <a:pPr marL="626364" lvl="1" indent="-342900"/>
-            <a:r>
-              <a:rPr lang="fr-FR" dirty="0">
-                <a:latin typeface="Calibri" panose="020F0502020204030204" pitchFamily="34" charset="0"/>
-                <a:ea typeface="Calibri" panose="020F0502020204030204" pitchFamily="34" charset="0"/>
-                <a:cs typeface="Calibri" panose="020F0502020204030204" pitchFamily="34" charset="0"/>
-              </a:rPr>
-              <a:t>Use a longer timeout (15-30 min) for a </a:t>
-            </a:r>
-            <a:r>
-              <a:rPr lang="fr-FR" dirty="0" err="1">
-                <a:latin typeface="Calibri" panose="020F0502020204030204" pitchFamily="34" charset="0"/>
-                <a:ea typeface="Calibri" panose="020F0502020204030204" pitchFamily="34" charset="0"/>
-                <a:cs typeface="Calibri" panose="020F0502020204030204" pitchFamily="34" charset="0"/>
-              </a:rPr>
-              <a:t>realistic</a:t>
-            </a:r>
-            <a:r>
-              <a:rPr lang="fr-FR" dirty="0">
-                <a:latin typeface="Calibri" panose="020F0502020204030204" pitchFamily="34" charset="0"/>
-                <a:ea typeface="Calibri" panose="020F0502020204030204" pitchFamily="34" charset="0"/>
-                <a:cs typeface="Calibri" panose="020F0502020204030204" pitchFamily="34" charset="0"/>
-              </a:rPr>
-              <a:t> production scenario</a:t>
+              <a:t>Use a realistic timeout (15-30 minutes) for production.</a:t>
             </a:r>
           </a:p>
         </p:txBody>

--- a/presentation/slides.pptx
+++ b/presentation/slides.pptx
@@ -10638,7 +10638,7 @@
                         <a:buNone/>
                       </a:pPr>
                       <a:r>
-                        <a:rPr lang="fr-FR">
+                        <a:rPr lang="fr-FR" dirty="0">
                           <a:effectLst/>
                           <a:latin typeface="Calibri" panose="020F0502020204030204" pitchFamily="34" charset="0"/>
                           <a:ea typeface="Calibri" panose="020F0502020204030204" pitchFamily="34" charset="0"/>
@@ -10687,7 +10687,7 @@
                         <a:buNone/>
                       </a:pPr>
                       <a:r>
-                        <a:rPr lang="fr-FR">
+                        <a:rPr lang="fr-FR" dirty="0" err="1">
                           <a:effectLst/>
                           <a:latin typeface="Calibri" panose="020F0502020204030204" pitchFamily="34" charset="0"/>
                           <a:ea typeface="Calibri" panose="020F0502020204030204" pitchFamily="34" charset="0"/>
@@ -10695,6 +10695,12 @@
                         </a:rPr>
                         <a:t>Auto-Approve</a:t>
                       </a:r>
+                      <a:endParaRPr lang="fr-FR" dirty="0">
+                        <a:effectLst/>
+                        <a:latin typeface="Calibri" panose="020F0502020204030204" pitchFamily="34" charset="0"/>
+                        <a:ea typeface="Calibri" panose="020F0502020204030204" pitchFamily="34" charset="0"/>
+                        <a:cs typeface="Calibri" panose="020F0502020204030204" pitchFamily="34" charset="0"/>
+                      </a:endParaRPr>
                     </a:p>
                   </a:txBody>
                   <a:tcPr anchor="ctr"/>
@@ -10708,14 +10714,56 @@
                         <a:buNone/>
                       </a:pPr>
                       <a:r>
-                        <a:rPr lang="fr-FR">
+                        <a:rPr lang="fr-FR" dirty="0" err="1">
                           <a:effectLst/>
                           <a:latin typeface="Calibri" panose="020F0502020204030204" pitchFamily="34" charset="0"/>
                           <a:ea typeface="Calibri" panose="020F0502020204030204" pitchFamily="34" charset="0"/>
                           <a:cs typeface="Calibri" panose="020F0502020204030204" pitchFamily="34" charset="0"/>
                         </a:rPr>
-                        <a:t>Amount &lt; $100 → approved immediately</a:t>
+                        <a:t>Amount</a:t>
                       </a:r>
+                      <a:r>
+                        <a:rPr lang="fr-FR" dirty="0">
+                          <a:effectLst/>
+                          <a:latin typeface="Calibri" panose="020F0502020204030204" pitchFamily="34" charset="0"/>
+                          <a:ea typeface="Calibri" panose="020F0502020204030204" pitchFamily="34" charset="0"/>
+                          <a:cs typeface="Calibri" panose="020F0502020204030204" pitchFamily="34" charset="0"/>
+                        </a:rPr>
+                        <a:t> &lt; $100 → </a:t>
+                      </a:r>
+                      <a:r>
+                        <a:rPr lang="fr-FR" dirty="0" err="1">
+                          <a:effectLst/>
+                          <a:latin typeface="Calibri" panose="020F0502020204030204" pitchFamily="34" charset="0"/>
+                          <a:ea typeface="Calibri" panose="020F0502020204030204" pitchFamily="34" charset="0"/>
+                          <a:cs typeface="Calibri" panose="020F0502020204030204" pitchFamily="34" charset="0"/>
+                        </a:rPr>
+                        <a:t>approved</a:t>
+                      </a:r>
+                      <a:r>
+                        <a:rPr lang="fr-FR" dirty="0">
+                          <a:effectLst/>
+                          <a:latin typeface="Calibri" panose="020F0502020204030204" pitchFamily="34" charset="0"/>
+                          <a:ea typeface="Calibri" panose="020F0502020204030204" pitchFamily="34" charset="0"/>
+                          <a:cs typeface="Calibri" panose="020F0502020204030204" pitchFamily="34" charset="0"/>
+                        </a:rPr>
+                        <a:t> </a:t>
+                      </a:r>
+                      <a:r>
+                        <a:rPr lang="fr-FR" dirty="0" err="1">
+                          <a:effectLst/>
+                          <a:latin typeface="Calibri" panose="020F0502020204030204" pitchFamily="34" charset="0"/>
+                          <a:ea typeface="Calibri" panose="020F0502020204030204" pitchFamily="34" charset="0"/>
+                          <a:cs typeface="Calibri" panose="020F0502020204030204" pitchFamily="34" charset="0"/>
+                        </a:rPr>
+                        <a:t>immediately</a:t>
+                      </a:r>
+                      <a:endParaRPr lang="fr-FR" dirty="0">
+                        <a:effectLst/>
+                        <a:latin typeface="Calibri" panose="020F0502020204030204" pitchFamily="34" charset="0"/>
+                        <a:ea typeface="Calibri" panose="020F0502020204030204" pitchFamily="34" charset="0"/>
+                        <a:cs typeface="Calibri" panose="020F0502020204030204" pitchFamily="34" charset="0"/>
+                      </a:endParaRPr>
                     </a:p>
                   </a:txBody>
                   <a:tcPr anchor="ctr"/>
@@ -10736,14 +10784,29 @@
                         <a:buNone/>
                       </a:pPr>
                       <a:r>
-                        <a:rPr lang="fr-FR">
+                        <a:rPr lang="fr-FR" dirty="0">
                           <a:effectLst/>
                           <a:latin typeface="Calibri" panose="020F0502020204030204" pitchFamily="34" charset="0"/>
                           <a:ea typeface="Calibri" panose="020F0502020204030204" pitchFamily="34" charset="0"/>
                           <a:cs typeface="Calibri" panose="020F0502020204030204" pitchFamily="34" charset="0"/>
                         </a:rPr>
-                        <a:t>Manager Approval</a:t>
+                        <a:t>Manager </a:t>
                       </a:r>
+                      <a:r>
+                        <a:rPr lang="fr-FR" dirty="0" err="1">
+                          <a:effectLst/>
+                          <a:latin typeface="Calibri" panose="020F0502020204030204" pitchFamily="34" charset="0"/>
+                          <a:ea typeface="Calibri" panose="020F0502020204030204" pitchFamily="34" charset="0"/>
+                          <a:cs typeface="Calibri" panose="020F0502020204030204" pitchFamily="34" charset="0"/>
+                        </a:rPr>
+                        <a:t>Approval</a:t>
+                      </a:r>
+                      <a:endParaRPr lang="fr-FR" dirty="0">
+                        <a:effectLst/>
+                        <a:latin typeface="Calibri" panose="020F0502020204030204" pitchFamily="34" charset="0"/>
+                        <a:ea typeface="Calibri" panose="020F0502020204030204" pitchFamily="34" charset="0"/>
+                        <a:cs typeface="Calibri" panose="020F0502020204030204" pitchFamily="34" charset="0"/>
+                      </a:endParaRPr>
                     </a:p>
                   </a:txBody>
                   <a:tcPr anchor="ctr"/>
@@ -10785,7 +10848,7 @@
                         <a:buNone/>
                       </a:pPr>
                       <a:r>
-                        <a:rPr lang="fr-FR">
+                        <a:rPr lang="fr-FR" dirty="0">
                           <a:effectLst/>
                           <a:latin typeface="Calibri" panose="020F0502020204030204" pitchFamily="34" charset="0"/>
                           <a:ea typeface="Calibri" panose="020F0502020204030204" pitchFamily="34" charset="0"/>
@@ -10806,14 +10869,47 @@
                         <a:buNone/>
                       </a:pPr>
                       <a:r>
-                        <a:rPr lang="fr-FR">
+                        <a:rPr lang="fr-FR" dirty="0">
                           <a:effectLst/>
                           <a:latin typeface="Calibri" panose="020F0502020204030204" pitchFamily="34" charset="0"/>
                           <a:ea typeface="Calibri" panose="020F0502020204030204" pitchFamily="34" charset="0"/>
                           <a:cs typeface="Calibri" panose="020F0502020204030204" pitchFamily="34" charset="0"/>
                         </a:rPr>
-                        <a:t>No response in 2 min → escalated</a:t>
+                        <a:t>No </a:t>
                       </a:r>
+                      <a:r>
+                        <a:rPr lang="fr-FR" dirty="0" err="1">
+                          <a:effectLst/>
+                          <a:latin typeface="Calibri" panose="020F0502020204030204" pitchFamily="34" charset="0"/>
+                          <a:ea typeface="Calibri" panose="020F0502020204030204" pitchFamily="34" charset="0"/>
+                          <a:cs typeface="Calibri" panose="020F0502020204030204" pitchFamily="34" charset="0"/>
+                        </a:rPr>
+                        <a:t>response</a:t>
+                      </a:r>
+                      <a:r>
+                        <a:rPr lang="fr-FR" dirty="0">
+                          <a:effectLst/>
+                          <a:latin typeface="Calibri" panose="020F0502020204030204" pitchFamily="34" charset="0"/>
+                          <a:ea typeface="Calibri" panose="020F0502020204030204" pitchFamily="34" charset="0"/>
+                          <a:cs typeface="Calibri" panose="020F0502020204030204" pitchFamily="34" charset="0"/>
+                        </a:rPr>
+                        <a:t> in 2 min → </a:t>
+                      </a:r>
+                      <a:r>
+                        <a:rPr lang="fr-FR" dirty="0" err="1">
+                          <a:effectLst/>
+                          <a:latin typeface="Calibri" panose="020F0502020204030204" pitchFamily="34" charset="0"/>
+                          <a:ea typeface="Calibri" panose="020F0502020204030204" pitchFamily="34" charset="0"/>
+                          <a:cs typeface="Calibri" panose="020F0502020204030204" pitchFamily="34" charset="0"/>
+                        </a:rPr>
+                        <a:t>escalated</a:t>
+                      </a:r>
+                      <a:endParaRPr lang="fr-FR" dirty="0">
+                        <a:effectLst/>
+                        <a:latin typeface="Calibri" panose="020F0502020204030204" pitchFamily="34" charset="0"/>
+                        <a:ea typeface="Calibri" panose="020F0502020204030204" pitchFamily="34" charset="0"/>
+                        <a:cs typeface="Calibri" panose="020F0502020204030204" pitchFamily="34" charset="0"/>
+                      </a:endParaRPr>
                     </a:p>
                   </a:txBody>
                   <a:tcPr anchor="ctr"/>
@@ -10834,7 +10930,7 @@
                         <a:buNone/>
                       </a:pPr>
                       <a:r>
-                        <a:rPr lang="fr-FR">
+                        <a:rPr lang="fr-FR" dirty="0">
                           <a:effectLst/>
                           <a:latin typeface="Calibri" panose="020F0502020204030204" pitchFamily="34" charset="0"/>
                           <a:ea typeface="Calibri" panose="020F0502020204030204" pitchFamily="34" charset="0"/>
